--- a/docs/KG_Academy_Manual_Funcional.pptx
+++ b/docs/KG_Academy_Manual_Funcional.pptx
@@ -3302,7 +3302,7 @@
                 </a:solidFill>
                 <a:latin typeface="Segoe UI"/>
               </a:rPr>
-              <a:t>MANUAL FUNCIONAL  ·  VERSION 1.0</a:t>
+              <a:t>MANUAL FUNCIONAL  ·  VERSIÓN 1.0</a:t>
             </a:r>
           </a:p>
         </p:txBody>
@@ -3363,7 +3363,7 @@
                 </a:solidFill>
                 <a:latin typeface="Segoe UI"/>
               </a:rPr>
-              <a:t>Como funciona la plataforma</a:t>
+              <a:t>Cómo funciona la plataforma</a:t>
             </a:r>
           </a:p>
         </p:txBody>
@@ -3449,7 +3449,7 @@
                 </a:solidFill>
                 <a:latin typeface="Segoe UI"/>
               </a:rPr>
-              <a:t>Recorrido modulo por modulo: roles y permisos, aula virtual, motor de progreso, calificacion de evaluaciones, emision de certificados, panel empresarial, gamificacion, notificaciones y auditoria.</a:t>
+              <a:t>Recorrido módulo por módulo: roles y permisos, aula virtual, motor de progreso, calificación de evaluaciones, emisión de certificados, panel empresarial, gamificación, notificaciones y auditoría.</a:t>
             </a:r>
           </a:p>
         </p:txBody>
@@ -3491,7 +3491,7 @@
                 </a:solidFill>
                 <a:latin typeface="Segoe UI"/>
               </a:rPr>
-              <a:t>KG GESTION INTEGRAL S.A.S.  ·  KATERINE GUANARITA</a:t>
+              <a:t>KG GESTIÓN INTEGRAL S.A.S.  ·  KATERINE GUAÑARITA</a:t>
             </a:r>
           </a:p>
           <a:p>
@@ -3510,7 +3510,7 @@
                 </a:solidFill>
                 <a:latin typeface="Segoe UI"/>
               </a:rPr>
-              <a:t>Realizado por Diego Alejandro Hernandez Blanco</a:t>
+              <a:t>Realizado por Diego Alejandro Hernández Blanco</a:t>
             </a:r>
           </a:p>
           <a:p>
@@ -3529,7 +3529,7 @@
                 </a:solidFill>
                 <a:latin typeface="Segoe UI"/>
               </a:rPr>
-              <a:t>Bogota D.C., Colombia  ·  2026</a:t>
+              <a:t>Bogotá D.C., Colombia  ·  2026</a:t>
             </a:r>
           </a:p>
         </p:txBody>
@@ -3739,7 +3739,7 @@
                 </a:solidFill>
                 <a:latin typeface="Segoe UI"/>
               </a:rPr>
-              <a:t>Esta es la regla mas importante de la plataforma y es configurable curso por curso.</a:t>
+              <a:t>Esta es la regla más importante de la plataforma y es configurable curso por curso.</a:t>
             </a:r>
           </a:p>
         </p:txBody>
@@ -3781,7 +3781,7 @@
                 </a:solidFill>
                 <a:latin typeface="Segoe UI"/>
               </a:rPr>
-              <a:t>KG Academy  ·  KG Gestion Integral S.A.S.  ·  Desarrollado por Diego Alejandro Hernandez Blanco</a:t>
+              <a:t>KG Academy  ·  KG Gestión Integral S.A.S.  ·  Desarrollado por Diego Alejandro Hernández Blanco</a:t>
             </a:r>
           </a:p>
         </p:txBody>
@@ -4079,7 +4079,7 @@
                 </a:solidFill>
                 <a:latin typeface="Segoe UI"/>
               </a:rPr>
-              <a:t>Todas las lecciones pesan igual. Es la mas facil de explicar al auditor.</a:t>
+              <a:t>Todas las lecciones pesan igual. Es la más fácil de explicar al auditor.</a:t>
             </a:r>
           </a:p>
         </p:txBody>
@@ -4293,7 +4293,7 @@
                 </a:solidFill>
                 <a:latin typeface="Segoe UI"/>
               </a:rPr>
-              <a:t>Permite que una leccion larga valga mas que una corta.</a:t>
+              <a:t>Permite que una lección larga valga más que una corta.</a:t>
             </a:r>
           </a:p>
         </p:txBody>
@@ -4488,7 +4488,7 @@
                 </a:solidFill>
                 <a:latin typeface="Segoe UI"/>
               </a:rPr>
-              <a:t>% = suma ponderada del avance de cada modulo segun su peso</a:t>
+              <a:t>% = suma ponderada del avance de cada módulo según su peso</a:t>
             </a:r>
           </a:p>
           <a:p>
@@ -4507,7 +4507,7 @@
                 </a:solidFill>
                 <a:latin typeface="Segoe UI"/>
               </a:rPr>
-              <a:t>Util cuando un modulo completo debe pesar mas que otro.</a:t>
+              <a:t>Útil cuando un módulo completo debe pesar más que otro.</a:t>
             </a:r>
           </a:p>
         </p:txBody>
@@ -4614,7 +4614,7 @@
                 </a:solidFill>
                 <a:latin typeface="Segoe UI"/>
               </a:rPr>
-              <a:t>Primeros Auxilios Basicos</a:t>
+              <a:t>Curso Básico de Primeros Auxilios</a:t>
             </a:r>
           </a:p>
           <a:p>
@@ -4633,7 +4633,7 @@
                 </a:solidFill>
                 <a:latin typeface="Segoe UI"/>
               </a:rPr>
-              <a:t>17 lecciones obligatorias</a:t>
+              <a:t>7 lecciones obligatorias  ·  40 horas</a:t>
             </a:r>
           </a:p>
         </p:txBody>
@@ -4721,7 +4721,7 @@
                 </a:solidFill>
                 <a:latin typeface="Segoe UI"/>
               </a:rPr>
-              <a:t>Completa 6 lecciones</a:t>
+              <a:t>Completa 2 lecciones</a:t>
             </a:r>
           </a:p>
           <a:p>
@@ -4740,7 +4740,7 @@
                 </a:solidFill>
                 <a:latin typeface="Segoe UI"/>
               </a:rPr>
-              <a:t>6 / 17</a:t>
+              <a:t>2 / 7</a:t>
             </a:r>
           </a:p>
           <a:p>
@@ -4759,7 +4759,7 @@
                 </a:solidFill>
                 <a:latin typeface="Segoe UI"/>
               </a:rPr>
-              <a:t>35,3 %</a:t>
+              <a:t>28,6 %</a:t>
             </a:r>
           </a:p>
         </p:txBody>
@@ -4847,7 +4847,7 @@
                 </a:solidFill>
                 <a:latin typeface="Segoe UI"/>
               </a:rPr>
-              <a:t>Completa 12 lecciones</a:t>
+              <a:t>Completa 5 lecciones</a:t>
             </a:r>
           </a:p>
           <a:p>
@@ -4866,7 +4866,7 @@
                 </a:solidFill>
                 <a:latin typeface="Segoe UI"/>
               </a:rPr>
-              <a:t>12 / 17</a:t>
+              <a:t>5 / 7</a:t>
             </a:r>
           </a:p>
           <a:p>
@@ -4885,7 +4885,7 @@
                 </a:solidFill>
                 <a:latin typeface="Segoe UI"/>
               </a:rPr>
-              <a:t>70,6 %</a:t>
+              <a:t>71,4 %</a:t>
             </a:r>
           </a:p>
         </p:txBody>
@@ -4973,7 +4973,7 @@
                 </a:solidFill>
                 <a:latin typeface="Segoe UI"/>
               </a:rPr>
-              <a:t>Completa 17 lecciones</a:t>
+              <a:t>Completa 7 lecciones</a:t>
             </a:r>
           </a:p>
           <a:p>
@@ -4992,7 +4992,7 @@
                 </a:solidFill>
                 <a:latin typeface="Segoe UI"/>
               </a:rPr>
-              <a:t>17 / 17</a:t>
+              <a:t>7 / 7</a:t>
             </a:r>
           </a:p>
           <a:p>
@@ -5011,7 +5011,7 @@
                 </a:solidFill>
                 <a:latin typeface="Segoe UI"/>
               </a:rPr>
-              <a:t>100 %  pero aun NO aprobado</a:t>
+              <a:t>100 %  pero aún NO aprobado</a:t>
             </a:r>
           </a:p>
         </p:txBody>
@@ -5101,7 +5101,7 @@
                 </a:solidFill>
                 <a:latin typeface="Segoe UI"/>
               </a:rPr>
-              <a:t>Llegar al 100 % de lecciones NO aprueba el curso por si solo: falta la evaluacion final. Ver la lamina siguiente.</a:t>
+              <a:t>Llegar al 100 % de lecciones NO aprueba el curso por si solo: falta la evaluación final. Ver la lamina siguiente.</a:t>
             </a:r>
           </a:p>
         </p:txBody>
@@ -5311,7 +5311,7 @@
                 </a:solidFill>
                 <a:latin typeface="Segoe UI"/>
               </a:rPr>
-              <a:t>El sistema evalua dos condiciones. Las dos deben cumplirse.</a:t>
+              <a:t>El sistema evalúa dos condiciones. Las dos deben cumplirse.</a:t>
             </a:r>
           </a:p>
         </p:txBody>
@@ -5353,7 +5353,7 @@
                 </a:solidFill>
                 <a:latin typeface="Segoe UI"/>
               </a:rPr>
-              <a:t>KG Academy  ·  KG Gestion Integral S.A.S.  ·  Desarrollado por Diego Alejandro Hernandez Blanco</a:t>
+              <a:t>KG Academy  ·  KG Gestión Integral S.A.S.  ·  Desarrollado por Diego Alejandro Hernández Blanco</a:t>
             </a:r>
           </a:p>
         </p:txBody>
@@ -5592,7 +5592,7 @@
                 </a:solidFill>
                 <a:latin typeface="Segoe UI"/>
               </a:rPr>
-              <a:t>Si el curso tiene requiresAllLessons activo (asi estan los tres cursos de KG).</a:t>
+              <a:t>Si el curso tiene requiresAllLessons activo (así están los tres cursos de KG).</a:t>
             </a:r>
           </a:p>
         </p:txBody>
@@ -5823,7 +5823,7 @@
                 </a:solidFill>
                 <a:latin typeface="Segoe UI"/>
               </a:rPr>
-              <a:t>Evaluacion final aprobada</a:t>
+              <a:t>Evaluación final aprobada</a:t>
             </a:r>
           </a:p>
           <a:p>
@@ -5842,7 +5842,7 @@
                 </a:solidFill>
                 <a:latin typeface="Segoe UI"/>
               </a:rPr>
-              <a:t>Nota igual o superior al minimo del curso (80 sobre 100 por defecto).</a:t>
+              <a:t>Nota igual o superior al mínimo del curso (80 sobre 100 por defecto).</a:t>
             </a:r>
           </a:p>
         </p:txBody>
@@ -6101,7 +6101,7 @@
                 </a:solidFill>
                 <a:latin typeface="Segoe UI"/>
               </a:rPr>
-              <a:t>Con codigo unico, QR y los datos congelados</a:t>
+              <a:t>Con código único, QR y los datos congelados</a:t>
             </a:r>
           </a:p>
         </p:txBody>
@@ -6263,7 +6263,7 @@
                 </a:solidFill>
                 <a:latin typeface="Segoe UI"/>
               </a:rPr>
-              <a:t>Al marcador de gamificacion del trabajador</a:t>
+              <a:t>Al marcador de gamificación del trabajador</a:t>
             </a:r>
           </a:p>
         </p:txBody>
@@ -6568,7 +6568,7 @@
                 </a:solidFill>
                 <a:latin typeface="Segoe UI"/>
               </a:rPr>
-              <a:t>Cierra la asignacion</a:t>
+              <a:t>Cierra la asignación</a:t>
             </a:r>
           </a:p>
           <a:p>
@@ -6749,7 +6749,7 @@
                 </a:solidFill>
                 <a:latin typeface="Segoe UI"/>
               </a:rPr>
-              <a:t>Cumplimiento por area, cargo y sede</a:t>
+              <a:t>Cumplimiento por área, cargo y sede</a:t>
             </a:r>
           </a:p>
         </p:txBody>
@@ -6929,7 +6929,7 @@
                 </a:solidFill>
                 <a:latin typeface="Segoe UI"/>
               </a:rPr>
-              <a:t>El historico nunca se borra: una edicion administrativa del curso no elimina el avance ya registrado.</a:t>
+              <a:t>El histórico nunca se borra: una edición administrativa del curso no elimina el avance ya registrado.</a:t>
             </a:r>
           </a:p>
         </p:txBody>
@@ -7101,7 +7101,7 @@
                 </a:solidFill>
                 <a:latin typeface="Segoe UI"/>
               </a:rPr>
-              <a:t>MODULO 05</a:t>
+              <a:t>MÓDULO 05</a:t>
             </a:r>
           </a:p>
           <a:p>
@@ -7120,7 +7120,7 @@
                 </a:solidFill>
                 <a:latin typeface="Segoe UI"/>
               </a:rPr>
-              <a:t>Evaluaciones: tipos y configuracion</a:t>
+              <a:t>Evaluaciones: tipos y configuración</a:t>
             </a:r>
           </a:p>
           <a:p>
@@ -7139,7 +7139,7 @@
                 </a:solidFill>
                 <a:latin typeface="Segoe UI"/>
               </a:rPr>
-              <a:t>Cada curso puede tener evaluacion diagnostica, evaluaciones por modulo y evaluacion final.</a:t>
+              <a:t>Cada curso puede tener evaluación diagnóstica, evaluaciones por módulo y evaluación final.</a:t>
             </a:r>
           </a:p>
         </p:txBody>
@@ -7181,7 +7181,7 @@
                 </a:solidFill>
                 <a:latin typeface="Segoe UI"/>
               </a:rPr>
-              <a:t>KG Academy  ·  KG Gestion Integral S.A.S.  ·  Desarrollado por Diego Alejandro Hernandez Blanco</a:t>
+              <a:t>KG Academy  ·  KG Gestión Integral S.A.S.  ·  Desarrollado por Diego Alejandro Hernández Blanco</a:t>
             </a:r>
           </a:p>
         </p:txBody>
@@ -7359,7 +7359,7 @@
                 </a:solidFill>
                 <a:latin typeface="Segoe UI"/>
               </a:rPr>
-              <a:t>DIAGNOSTICA</a:t>
+              <a:t>DIAGNÓSTICA</a:t>
             </a:r>
           </a:p>
         </p:txBody>
@@ -7439,7 +7439,7 @@
                 </a:solidFill>
                 <a:latin typeface="Segoe UI"/>
               </a:rPr>
-              <a:t>NO afecta la aprobacion. Siempre se registra como presentada</a:t>
+              <a:t>NO afecta la aprobación. Siempre se registra como presentada</a:t>
             </a:r>
           </a:p>
         </p:txBody>
@@ -7575,7 +7575,7 @@
                 </a:solidFill>
                 <a:latin typeface="Segoe UI"/>
               </a:rPr>
-              <a:t>POR MODULO</a:t>
+              <a:t>POR MÓDULO</a:t>
             </a:r>
           </a:p>
         </p:txBody>
@@ -7852,7 +7852,7 @@
                 </a:solidFill>
                 <a:latin typeface="Segoe UI"/>
               </a:rPr>
-              <a:t>Decide la aprobacion</a:t>
+              <a:t>Decide la aprobación</a:t>
             </a:r>
           </a:p>
           <a:p>
@@ -7913,7 +7913,7 @@
                 </a:solidFill>
                 <a:latin typeface="Segoe UI"/>
               </a:rPr>
-              <a:t>PARAMETROS QUE SE CONFIGURAN EN CADA EVALUACION</a:t>
+              <a:t>PARAMETROS QUE SE CONFIGURAN EN CADA EVALUACIÓN</a:t>
             </a:r>
           </a:p>
         </p:txBody>
@@ -8003,7 +8003,7 @@
                 </a:solidFill>
                 <a:latin typeface="Segoe UI"/>
               </a:rPr>
-              <a:t>Nota minima</a:t>
+              <a:t>Nota mínima</a:t>
             </a:r>
           </a:p>
           <a:p>
@@ -8131,7 +8131,7 @@
                 </a:solidFill>
                 <a:latin typeface="Segoe UI"/>
               </a:rPr>
-              <a:t>Intentos maximos</a:t>
+              <a:t>Intentos máximos</a:t>
             </a:r>
           </a:p>
           <a:p>
@@ -8259,7 +8259,7 @@
                 </a:solidFill>
                 <a:latin typeface="Segoe UI"/>
               </a:rPr>
-              <a:t>Tiempo limite</a:t>
+              <a:t>Tiempo límite</a:t>
             </a:r>
           </a:p>
           <a:p>
@@ -8553,7 +8553,7 @@
                 </a:solidFill>
                 <a:latin typeface="Segoe UI"/>
               </a:rPr>
-              <a:t>Dificulta copiar respuestas entre companeros</a:t>
+              <a:t>Dificulta copiar respuestas entre compañeros</a:t>
             </a:r>
           </a:p>
         </p:txBody>
@@ -8809,7 +8809,7 @@
                 </a:solidFill>
                 <a:latin typeface="Segoe UI"/>
               </a:rPr>
-              <a:t>Se decide por evaluacion</a:t>
+              <a:t>Se decide por evaluación</a:t>
             </a:r>
           </a:p>
         </p:txBody>
@@ -9199,7 +9199,7 @@
                 </a:solidFill>
                 <a:latin typeface="Segoe UI"/>
               </a:rPr>
-              <a:t>MODULO 05</a:t>
+              <a:t>MÓDULO 05</a:t>
             </a:r>
           </a:p>
           <a:p>
@@ -9218,7 +9218,7 @@
                 </a:solidFill>
                 <a:latin typeface="Segoe UI"/>
               </a:rPr>
-              <a:t>Como se calcula la NOTA de una evaluacion</a:t>
+              <a:t>Como se calcula la NOTA de una evaluación</a:t>
             </a:r>
           </a:p>
           <a:p>
@@ -9237,7 +9237,7 @@
                 </a:solidFill>
                 <a:latin typeface="Segoe UI"/>
               </a:rPr>
-              <a:t>Calificacion automatica en el servidor. El estudiante ve el resultado de inmediato.</a:t>
+              <a:t>Calificación automática en el servidor. El estudiante ve el resultado de inmediato.</a:t>
             </a:r>
           </a:p>
         </p:txBody>
@@ -9279,7 +9279,7 @@
                 </a:solidFill>
                 <a:latin typeface="Segoe UI"/>
               </a:rPr>
-              <a:t>KG Academy  ·  KG Gestion Integral S.A.S.  ·  Desarrollado por Diego Alejandro Hernandez Blanco</a:t>
+              <a:t>KG Academy  ·  KG Gestión Integral S.A.S.  ·  Desarrollado por Diego Alejandro Hernández Blanco</a:t>
             </a:r>
           </a:p>
         </p:txBody>
@@ -9428,7 +9428,7 @@
                 </a:solidFill>
                 <a:latin typeface="Segoe UI"/>
               </a:rPr>
-              <a:t>NOTA  =  ( puntos obtenidos  /  puntos posibles )  ×  100          APRUEBA si  NOTA  ≥  nota minima del curso</a:t>
+              <a:t>NOTA  =  ( puntos obtenidos  /  puntos posibles )  ×  100          APRUEBA si  NOTA  ≥  nota mínima del curso</a:t>
             </a:r>
           </a:p>
         </p:txBody>
@@ -9470,7 +9470,7 @@
                 </a:solidFill>
                 <a:latin typeface="Segoe UI"/>
               </a:rPr>
-              <a:t>EJEMPLO CON LA EVALUACION FINAL DE KG-PA-001</a:t>
+              <a:t>EJEMPLO CON LA EVALUACIÓN FINAL DE KG-PA-001</a:t>
             </a:r>
           </a:p>
         </p:txBody>
@@ -9560,7 +9560,7 @@
                 </a:solidFill>
                 <a:latin typeface="Segoe UI"/>
               </a:rPr>
-              <a:t>Preguntas de la evaluacion</a:t>
+              <a:t>Preguntas de la evaluación</a:t>
             </a:r>
           </a:p>
         </p:txBody>
@@ -10352,7 +10352,7 @@
                 </a:solidFill>
                 <a:latin typeface="Segoe UI"/>
               </a:rPr>
-              <a:t>Nota minima del curso</a:t>
+              <a:t>Nota mínima del curso</a:t>
             </a:r>
           </a:p>
         </p:txBody>
@@ -10876,7 +10876,7 @@
                 </a:solidFill>
                 <a:latin typeface="Segoe UI"/>
               </a:rPr>
-              <a:t>Diagnostica</a:t>
+              <a:t>Diagnóstica</a:t>
             </a:r>
           </a:p>
           <a:p>
@@ -11004,7 +11004,7 @@
                 </a:solidFill>
                 <a:latin typeface="Segoe UI"/>
               </a:rPr>
-              <a:t>Se cuentan aunque se abandone. Al llegar al maximo sin aprobar, se bloquea.</a:t>
+              <a:t>Se cuentan aunque se abandone. Al llegar al máximo sin aprobar, se bloquea.</a:t>
             </a:r>
           </a:p>
         </p:txBody>
@@ -11094,7 +11094,7 @@
                 </a:solidFill>
                 <a:latin typeface="Segoe UI"/>
               </a:rPr>
-              <a:t>Si ya aprobo</a:t>
+              <a:t>Si ya aprobó</a:t>
             </a:r>
           </a:p>
           <a:p>
@@ -11113,7 +11113,7 @@
                 </a:solidFill>
                 <a:latin typeface="Segoe UI"/>
               </a:rPr>
-              <a:t>No se exige mas; puede repasar sin afectar la nota obtenida.</a:t>
+              <a:t>No se exige más; puede repasar sin afectar la nota obtenida.</a:t>
             </a:r>
           </a:p>
         </p:txBody>
@@ -11203,7 +11203,7 @@
                 </a:solidFill>
                 <a:latin typeface="Segoe UI"/>
               </a:rPr>
-              <a:t>Historico</a:t>
+              <a:t>Histórico</a:t>
             </a:r>
           </a:p>
           <a:p>
@@ -11222,7 +11222,7 @@
                 </a:solidFill>
                 <a:latin typeface="Segoe UI"/>
               </a:rPr>
-              <a:t>Cada intento queda guardado con fecha, duracion y respuesta a cada pregunta.</a:t>
+              <a:t>Cada intento queda guardado con fecha, duración y respuesta a cada pregunta.</a:t>
             </a:r>
           </a:p>
         </p:txBody>
@@ -11312,7 +11312,7 @@
                 </a:solidFill>
                 <a:latin typeface="Segoe UI"/>
               </a:rPr>
-              <a:t>Al terminar, el estudiante ve pregunta por pregunta que respondio, si acerto y la explicacion pedagogica.</a:t>
+              <a:t>Al terminar, el estudiante ve pregunta por pregunta que respondio, si acerto y la explicacion pedagógica.</a:t>
             </a:r>
           </a:p>
         </p:txBody>
@@ -11484,7 +11484,7 @@
                 </a:solidFill>
                 <a:latin typeface="Segoe UI"/>
               </a:rPr>
-              <a:t>MODULO 06</a:t>
+              <a:t>MÓDULO 06</a:t>
             </a:r>
           </a:p>
           <a:p>
@@ -11522,7 +11522,7 @@
                 </a:solidFill>
                 <a:latin typeface="Segoe UI"/>
               </a:rPr>
-              <a:t>Se emiten solos cuando se cumple la regla de aprobacion. Nadie tiene que generarlos a mano.</a:t>
+              <a:t>Se emiten solos cuando se cumple la regla de aprobación. Nadie tiene que generarlos a mano.</a:t>
             </a:r>
           </a:p>
         </p:txBody>
@@ -11564,7 +11564,7 @@
                 </a:solidFill>
                 <a:latin typeface="Segoe UI"/>
               </a:rPr>
-              <a:t>KG Academy  ·  KG Gestion Integral S.A.S.  ·  Desarrollado por Diego Alejandro Hernandez Blanco</a:t>
+              <a:t>KG Academy  ·  KG Gestión Integral S.A.S.  ·  Desarrollado por Diego Alejandro Hernández Blanco</a:t>
             </a:r>
           </a:p>
         </p:txBody>
@@ -11757,7 +11757,7 @@
                 </a:solidFill>
                 <a:latin typeface="Segoe UI"/>
               </a:rPr>
-              <a:t>Congelado en el momento de la emision</a:t>
+              <a:t>Congelado en el momento de la emisión</a:t>
             </a:r>
           </a:p>
         </p:txBody>
@@ -11847,7 +11847,7 @@
                 </a:solidFill>
                 <a:latin typeface="Segoe UI"/>
               </a:rPr>
-              <a:t>Numero de documento</a:t>
+              <a:t>Número de documento</a:t>
             </a:r>
           </a:p>
           <a:p>
@@ -12174,7 +12174,7 @@
                 </a:solidFill>
                 <a:latin typeface="Segoe UI"/>
               </a:rPr>
-              <a:t>Calificacion final</a:t>
+              <a:t>Calificación final</a:t>
             </a:r>
           </a:p>
           <a:p>
@@ -12193,7 +12193,7 @@
                 </a:solidFill>
                 <a:latin typeface="Segoe UI"/>
               </a:rPr>
-              <a:t>La nota con la que aprobo</a:t>
+              <a:t>La nota con la que aprobó</a:t>
             </a:r>
           </a:p>
         </p:txBody>
@@ -12283,7 +12283,7 @@
                 </a:solidFill>
                 <a:latin typeface="Segoe UI"/>
               </a:rPr>
-              <a:t>Fecha de expedicion</a:t>
+              <a:t>Fecha de expedición</a:t>
             </a:r>
           </a:p>
           <a:p>
@@ -12302,7 +12302,7 @@
                 </a:solidFill>
                 <a:latin typeface="Segoe UI"/>
               </a:rPr>
-              <a:t>Dia de cumplimiento de la regla</a:t>
+              <a:t>Día de cumplimiento de la regla</a:t>
             </a:r>
           </a:p>
         </p:txBody>
@@ -12501,7 +12501,7 @@
                 </a:solidFill>
                 <a:latin typeface="Segoe UI"/>
               </a:rPr>
-              <a:t>Codigo unico</a:t>
+              <a:t>Código único</a:t>
             </a:r>
           </a:p>
           <a:p>
@@ -12610,7 +12610,7 @@
                 </a:solidFill>
                 <a:latin typeface="Segoe UI"/>
               </a:rPr>
-              <a:t>Codigo QR</a:t>
+              <a:t>Código QR</a:t>
             </a:r>
           </a:p>
           <a:p>
@@ -12629,7 +12629,7 @@
                 </a:solidFill>
                 <a:latin typeface="Segoe UI"/>
               </a:rPr>
-              <a:t>Lleva a la pagina publica de verificacion</a:t>
+              <a:t>Lleva a la página pública de verificación</a:t>
             </a:r>
           </a:p>
         </p:txBody>
@@ -12738,7 +12738,7 @@
                 </a:solidFill>
                 <a:latin typeface="Segoe UI"/>
               </a:rPr>
-              <a:t>Katerine Guanarita, Directora</a:t>
+              <a:t>Katerine Guañarita, Directora</a:t>
             </a:r>
           </a:p>
         </p:txBody>
@@ -12923,7 +12923,7 @@
                 </a:solidFill>
                 <a:latin typeface="Segoe UI"/>
               </a:rPr>
-              <a:t>Emision automatica</a:t>
+              <a:t>Emisión automática</a:t>
             </a:r>
           </a:p>
           <a:p>
@@ -12942,7 +12942,7 @@
                 </a:solidFill>
                 <a:latin typeface="Segoe UI"/>
               </a:rPr>
-              <a:t>Al cumplirse la regla de aprobacion.</a:t>
+              <a:t>Al cumplirse la regla de aprobación.</a:t>
             </a:r>
           </a:p>
         </p:txBody>
@@ -13247,7 +13247,7 @@
                 </a:solidFill>
                 <a:latin typeface="Segoe UI"/>
               </a:rPr>
-              <a:t>Verificacion publica</a:t>
+              <a:t>Verificación pública</a:t>
             </a:r>
           </a:p>
           <a:p>
@@ -13266,7 +13266,7 @@
                 </a:solidFill>
                 <a:latin typeface="Segoe UI"/>
               </a:rPr>
-              <a:t>Cualquiera valida el codigo en /verificar sin iniciar sesion.</a:t>
+              <a:t>Cualquiera valida el código en /verificar sin iniciar sesión.</a:t>
             </a:r>
           </a:p>
         </p:txBody>
@@ -13571,7 +13571,7 @@
                 </a:solidFill>
                 <a:latin typeface="Segoe UI"/>
               </a:rPr>
-              <a:t>Revocacion</a:t>
+              <a:t>Revocación</a:t>
             </a:r>
           </a:p>
           <a:p>
@@ -13680,7 +13680,7 @@
                 </a:solidFill>
                 <a:latin typeface="Segoe UI"/>
               </a:rPr>
-              <a:t>'Datos congelados' significa que si manana se edita el curso o cambia el nombre del trabajador, el certificado ya emitido conserva la informacion con la que fue expedido. Es lo que exige una auditoria.</a:t>
+              <a:t>'Datos congelados' significa que si mañana se edita el curso o cambia el nombre del trabajador, el certificado ya emitido conserva la información con la que fue expedido. Es lo que exige una auditoría.</a:t>
             </a:r>
           </a:p>
         </p:txBody>
@@ -13852,7 +13852,7 @@
                 </a:solidFill>
                 <a:latin typeface="Segoe UI"/>
               </a:rPr>
-              <a:t>MODULOS 07 A 09</a:t>
+              <a:t>MÓDULOS 07 A 09</a:t>
             </a:r>
           </a:p>
           <a:p>
@@ -13890,7 +13890,7 @@
                 </a:solidFill>
                 <a:latin typeface="Segoe UI"/>
               </a:rPr>
-              <a:t>Lo que usa talento humano del cliente para gestionar y demostrar la capacitacion.</a:t>
+              <a:t>Lo que usa talento humano del cliente para gestionar y demostrar la capacitación.</a:t>
             </a:r>
           </a:p>
         </p:txBody>
@@ -13932,7 +13932,7 @@
                 </a:solidFill>
                 <a:latin typeface="Segoe UI"/>
               </a:rPr>
-              <a:t>KG Academy  ·  KG Gestion Integral S.A.S.  ·  Desarrollado por Diego Alejandro Hernandez Blanco</a:t>
+              <a:t>KG Academy  ·  KG Gestión Integral S.A.S.  ·  Desarrollado por Diego Alejandro Hernández Blanco</a:t>
             </a:r>
           </a:p>
         </p:txBody>
@@ -14127,7 +14127,7 @@
                 </a:solidFill>
                 <a:latin typeface="Segoe UI"/>
               </a:rPr>
-              <a:t>La empresa se organiza en areas, cargos y sedes. Cada trabajador se ubica en las tres dimensiones, y eso permite despues medir por area, por cargo o por sede.</a:t>
+              <a:t>La empresa se organiza en áreas, cargos y sedes. Cada trabajador se ubica en las tres dimensiones, y eso permite después medir por área, por cargo o por sede.</a:t>
             </a:r>
           </a:p>
         </p:txBody>
@@ -14280,7 +14280,7 @@
                 </a:solidFill>
                 <a:latin typeface="Segoe UI"/>
               </a:rPr>
-              <a:t>Individual con un formulario, o masiva pegando una fila por persona con el formato nombres;apellidos;documento;correo;codigo. Los correos repetidos se omiten solos.</a:t>
+              <a:t>Individual con un formulario, o masiva pegando una fila por persona con el formato nombres;apellidos;documento;correo;código. Los correos repetidos se omiten solos.</a:t>
             </a:r>
           </a:p>
         </p:txBody>
@@ -14414,7 +14414,7 @@
                 </a:solidFill>
                 <a:latin typeface="Segoe UI"/>
               </a:rPr>
-              <a:t>Asignacion de cursos</a:t>
+              <a:t>Asignación de cursos</a:t>
             </a:r>
           </a:p>
           <a:p>
@@ -14433,7 +14433,7 @@
                 </a:solidFill>
                 <a:latin typeface="Segoe UI"/>
               </a:rPr>
-              <a:t>Se elige el curso, se filtra por area, se seleccionan las personas, se fija la fecha limite y si es obligatorio. Todo el lote queda agrupado para auditoria.</a:t>
+              <a:t>Se elige el curso, se filtra por área, se seleccionan las personas, se fija la fecha límite y si es obligatorio. Todo el lote queda agrupado para auditoría.</a:t>
             </a:r>
           </a:p>
         </p:txBody>
@@ -14586,7 +14586,7 @@
                 </a:solidFill>
                 <a:latin typeface="Segoe UI"/>
               </a:rPr>
-              <a:t>Tabla filtrable por curso, area y estado. Responde en un clic quien no ha iniciado, quien va en progreso, quien termino y a quien se le vencio el plazo.</a:t>
+              <a:t>Tabla filtrable por curso, área y estado. Responde en un clic quién no ha iniciado, quién va en progreso, quién terminó y a quién se le vencio el plazo.</a:t>
             </a:r>
           </a:p>
         </p:txBody>
@@ -14982,7 +14982,7 @@
                 </a:solidFill>
                 <a:latin typeface="Segoe UI"/>
               </a:rPr>
-              <a:t>Estados de una asignacion:  asignado  →  en progreso  →  completado.  Si pasa la fecha limite sin completarse, se muestra como vencido en rojo con los dias de atraso.</a:t>
+              <a:t>Estados de una asignación:  asignado  →  en progreso  →  completado.  Si pasa la fecha límite sin completarse, se muestra como vencido en rojo con los días de atraso.</a:t>
             </a:r>
           </a:p>
         </p:txBody>
@@ -15154,7 +15154,7 @@
                 </a:solidFill>
                 <a:latin typeface="Segoe UI"/>
               </a:rPr>
-              <a:t>MODULO 09</a:t>
+              <a:t>MÓDULO 09</a:t>
             </a:r>
           </a:p>
           <a:p>
@@ -15234,7 +15234,7 @@
                 </a:solidFill>
                 <a:latin typeface="Segoe UI"/>
               </a:rPr>
-              <a:t>KG Academy  ·  KG Gestion Integral S.A.S.  ·  Desarrollado por Diego Alejandro Hernandez Blanco</a:t>
+              <a:t>KG Academy  ·  KG Gestión Integral S.A.S.  ·  Desarrollado por Diego Alejandro Hernández Blanco</a:t>
             </a:r>
           </a:p>
         </p:txBody>
@@ -15429,7 +15429,7 @@
                 </a:solidFill>
                 <a:latin typeface="Segoe UI"/>
               </a:rPr>
-              <a:t>Una fila por asignacion</a:t>
+              <a:t>Una fila por asignación</a:t>
             </a:r>
           </a:p>
         </p:txBody>
@@ -15490,7 +15490,7 @@
                 </a:solidFill>
                 <a:latin typeface="Segoe UI"/>
               </a:rPr>
-              <a:t>Documento · Trabajador · Correo · Area · Cargo · Sede · Curso · Codigo · Obligatorio · Estado · Avance % · Nota final · Fecha limite · Inicio · Finalizacion</a:t>
+              <a:t>Documento · Trabajador · Correo · Área · Cargo · Sede · Curso · Código · Obligatorio · Estado · Avance % · Nota final · Fecha límite · Inicio · Finalización</a:t>
             </a:r>
           </a:p>
           <a:p>
@@ -15723,7 +15723,7 @@
                 </a:solidFill>
                 <a:latin typeface="Segoe UI"/>
               </a:rPr>
-              <a:t>Codigo · Nombres · Apellidos · Documento · Correo · Area · Cargo · Sede · Estado · Cursos asignados · Cursos completados · Avance promedio · Certificados · Ultimo acceso</a:t>
+              <a:t>Código · Nombres · Apellidos · Documento · Correo · Área · Cargo · Sede · Estado · Cursos asignados · Cursos completados · Avance promedio · Certificados · Último acceso</a:t>
             </a:r>
           </a:p>
           <a:p>
@@ -15956,7 +15956,7 @@
                 </a:solidFill>
                 <a:latin typeface="Segoe UI"/>
               </a:rPr>
-              <a:t>Codigo · Trabajador · Documento · Curso · Horas · Nota · Emitido · Vence · Estado · URL de verificacion</a:t>
+              <a:t>Código · Trabajador · Documento · Curso · Horas · Nota · Emitido · Vence · Estado · URL de verificación</a:t>
             </a:r>
           </a:p>
           <a:p>
@@ -15975,7 +15975,7 @@
                 </a:solidFill>
                 <a:latin typeface="Segoe UI"/>
               </a:rPr>
-              <a:t>Evidencia formal de la formacion impartida.</a:t>
+              <a:t>Evidencia formal de la formación impartida.</a:t>
             </a:r>
           </a:p>
         </p:txBody>
@@ -16065,7 +16065,7 @@
                 </a:solidFill>
                 <a:latin typeface="Segoe UI"/>
               </a:rPr>
-              <a:t>La exportacion a PDF con imagen corporativa y el envio programado por correo quedaron previstos para la Fase 2.</a:t>
+              <a:t>La exportación a PDF con imagen corporativa y el envío programado por correo quedaron previstos para la Fase 2.</a:t>
             </a:r>
           </a:p>
         </p:txBody>
@@ -16237,7 +16237,7 @@
                 </a:solidFill>
                 <a:latin typeface="Segoe UI"/>
               </a:rPr>
-              <a:t>MODULO 10</a:t>
+              <a:t>MÓDULO 10</a:t>
             </a:r>
           </a:p>
           <a:p>
@@ -16256,7 +16256,7 @@
                 </a:solidFill>
                 <a:latin typeface="Segoe UI"/>
               </a:rPr>
-              <a:t>Gamificacion: como funcionan los puntos</a:t>
+              <a:t>Gamificación: cómo funcionan los puntos</a:t>
             </a:r>
           </a:p>
           <a:p>
@@ -16275,7 +16275,7 @@
                 </a:solidFill>
                 <a:latin typeface="Segoe UI"/>
               </a:rPr>
-              <a:t>Sistema motivacional. Es independiente de la nota y NUNCA afecta la aprobacion ni el certificado.</a:t>
+              <a:t>Sistema motivacional. Es independiente de la nota y NUNCA afecta la aprobación ni el certificado.</a:t>
             </a:r>
           </a:p>
         </p:txBody>
@@ -16317,7 +16317,7 @@
                 </a:solidFill>
                 <a:latin typeface="Segoe UI"/>
               </a:rPr>
-              <a:t>KG Academy  ·  KG Gestion Integral S.A.S.  ·  Desarrollado por Diego Alejandro Hernandez Blanco</a:t>
+              <a:t>KG Academy  ·  KG Gestión Integral S.A.S.  ·  Desarrollado por Diego Alejandro Hernández Blanco</a:t>
             </a:r>
           </a:p>
         </p:txBody>
@@ -16585,7 +16585,7 @@
                 </a:solidFill>
                 <a:latin typeface="Segoe UI"/>
               </a:rPr>
-              <a:t>Completar una leccion</a:t>
+              <a:t>Completar una lección</a:t>
             </a:r>
           </a:p>
         </p:txBody>
@@ -16717,7 +16717,7 @@
                 </a:solidFill>
                 <a:latin typeface="Segoe UI"/>
               </a:rPr>
-              <a:t>Aprobar una evaluacion</a:t>
+              <a:t>Aprobar una evaluación</a:t>
             </a:r>
           </a:p>
         </p:txBody>
@@ -17021,7 +17021,7 @@
                 </a:solidFill>
                 <a:latin typeface="Segoe UI"/>
               </a:rPr>
-              <a:t>17 lecciones × 10</a:t>
+              <a:t>7 lecciones × 10</a:t>
             </a:r>
           </a:p>
         </p:txBody>
@@ -17063,7 +17063,7 @@
                 </a:solidFill>
                 <a:latin typeface="Segoe UI"/>
               </a:rPr>
-              <a:t>170</a:t>
+              <a:t>70</a:t>
             </a:r>
           </a:p>
         </p:txBody>
@@ -17105,7 +17105,7 @@
                 </a:solidFill>
                 <a:latin typeface="Segoe UI"/>
               </a:rPr>
-              <a:t>1 evaluacion final aprobada × 50</a:t>
+              <a:t>1 evaluación final aprobada × 50</a:t>
             </a:r>
           </a:p>
         </p:txBody>
@@ -17361,7 +17361,7 @@
                 </a:solidFill>
                 <a:latin typeface="Segoe UI"/>
               </a:rPr>
-              <a:t>320 puntos</a:t>
+              <a:t>220 puntos</a:t>
             </a:r>
           </a:p>
         </p:txBody>
@@ -17514,7 +17514,7 @@
                 </a:solidFill>
                 <a:latin typeface="Segoe UI"/>
               </a:rPr>
-              <a:t>Cada 250 puntos se sube de nivel.  Nivel = (puntos ÷ 250) + 1.  Con 320 puntos el trabajador esta en nivel 2 y le faltan 180 para el nivel 3.</a:t>
+              <a:t>Cada 250 puntos se sube de nivel.  Nivel = (puntos ÷ 250) + 1.  Con 220 puntos el trabajador esta en nivel 1 y le faltan 30 para el nivel 2.</a:t>
             </a:r>
           </a:p>
         </p:txBody>
@@ -17667,7 +17667,7 @@
                 </a:solidFill>
                 <a:latin typeface="Segoe UI"/>
               </a:rPr>
-              <a:t>Cuenta los dias seguidos en que completo al menos una leccion. Si deja pasar un dia, la racha vuelve a 1, pero se conserva el registro de la racha mas larga.</a:t>
+              <a:t>Cuenta los días seguidos en que completo al menos una lección. Si deja pasar un día, la racha vuelve a 1, pero se conserva el registro de la racha más larga.</a:t>
             </a:r>
           </a:p>
         </p:txBody>
@@ -17820,7 +17820,7 @@
                 </a:solidFill>
                 <a:latin typeface="Segoe UI"/>
               </a:rPr>
-              <a:t>Tabla con los cinco usuarios de mas puntos de la plataforma. El propio usuario se resalta como 'Usted'.</a:t>
+              <a:t>Tabla con los cinco usuarios de más puntos de la plataforma. El propio usuario se resalta como 'Usted'.</a:t>
             </a:r>
           </a:p>
         </p:txBody>
@@ -17973,7 +17973,7 @@
                 </a:solidFill>
                 <a:latin typeface="Segoe UI"/>
               </a:rPr>
-              <a:t>Hay 5 insignias definidas (Primer paso, Constante, Certificado obtenido, Brigadista KG, Nota perfecta). La entrega automatica queda para la Fase 2; hoy el catalogo esta creado y la insignia se puede otorgar.</a:t>
+              <a:t>Hay 5 insignias definidas (Primer paso, Constante, Certificado obtenido, Brigadista KG, Nota perfecta). La entrega automática queda para la Fase 2; hoy el catálogo está creado y la insignia se puede otorgar.</a:t>
             </a:r>
           </a:p>
         </p:txBody>
@@ -18235,7 +18235,7 @@
                 </a:solidFill>
                 <a:latin typeface="Segoe UI"/>
               </a:rPr>
-              <a:t>MODULOS 11 Y 12</a:t>
+              <a:t>MÓDULOS 11 Y 12</a:t>
             </a:r>
           </a:p>
           <a:p>
@@ -18254,7 +18254,7 @@
                 </a:solidFill>
                 <a:latin typeface="Segoe UI"/>
               </a:rPr>
-              <a:t>Notificaciones, auditoria y seguridad</a:t>
+              <a:t>Notificaciones, auditoría y seguridad</a:t>
             </a:r>
           </a:p>
           <a:p>
@@ -18273,7 +18273,7 @@
                 </a:solidFill>
                 <a:latin typeface="Segoe UI"/>
               </a:rPr>
-              <a:t>Los dos modulos que sostienen la operacion y la confianza en los datos.</a:t>
+              <a:t>Los dos módulos que sostienen la operacion y la confianza en los datos.</a:t>
             </a:r>
           </a:p>
         </p:txBody>
@@ -18315,7 +18315,7 @@
                 </a:solidFill>
                 <a:latin typeface="Segoe UI"/>
               </a:rPr>
-              <a:t>KG Academy  ·  KG Gestion Integral S.A.S.  ·  Desarrollado por Diego Alejandro Hernandez Blanco</a:t>
+              <a:t>KG Academy  ·  KG Gestión Integral S.A.S.  ·  Desarrollado por Diego Alejandro Hernández Blanco</a:t>
             </a:r>
           </a:p>
         </p:txBody>
@@ -18399,7 +18399,7 @@
                 </a:solidFill>
                 <a:latin typeface="Segoe UI"/>
               </a:rPr>
-              <a:t>NOTIFICACIONES AUTOMATICAS</a:t>
+              <a:t>NOTIFICACIONES AUTOMÁTICAS</a:t>
             </a:r>
           </a:p>
         </p:txBody>
@@ -18885,7 +18885,7 @@
                 </a:solidFill>
                 <a:latin typeface="Segoe UI"/>
               </a:rPr>
-              <a:t>Proximo a vencer</a:t>
+              <a:t>Próximo a vencer</a:t>
             </a:r>
           </a:p>
         </p:txBody>
@@ -18927,7 +18927,7 @@
                 </a:solidFill>
                 <a:latin typeface="Segoe UI"/>
               </a:rPr>
-              <a:t>Se acerca la fecha limite</a:t>
+              <a:t>Se acerca la fecha límite</a:t>
             </a:r>
           </a:p>
         </p:txBody>
@@ -19281,7 +19281,7 @@
                 </a:solidFill>
                 <a:latin typeface="Segoe UI"/>
               </a:rPr>
-              <a:t>Recuperar contrasena</a:t>
+              <a:t>Recuperar contraseña</a:t>
             </a:r>
           </a:p>
         </p:txBody>
@@ -19413,7 +19413,7 @@
                 </a:solidFill>
                 <a:latin typeface="Segoe UI"/>
               </a:rPr>
-              <a:t>Hoy llegan a la campana dentro de la plataforma. El envio por correo se activa al configurar el proveedor SMTP.</a:t>
+              <a:t>Hoy llegan a la campana dentro de la plataforma. El envío por correo se activa al configurar el proveedor SMTP.</a:t>
             </a:r>
           </a:p>
         </p:txBody>
@@ -19455,7 +19455,7 @@
                 </a:solidFill>
                 <a:latin typeface="Segoe UI"/>
               </a:rPr>
-              <a:t>AUDITORIA Y SEGURIDAD</a:t>
+              <a:t>AUDITORÍA Y SEGURIDAD</a:t>
             </a:r>
           </a:p>
         </p:txBody>
@@ -19589,7 +19589,7 @@
                 </a:solidFill>
                 <a:latin typeface="Segoe UI"/>
               </a:rPr>
-              <a:t>Que se audita</a:t>
+              <a:t>Qué se audita</a:t>
             </a:r>
           </a:p>
           <a:p>
@@ -19608,7 +19608,7 @@
                 </a:solidFill>
                 <a:latin typeface="Segoe UI"/>
               </a:rPr>
-              <a:t>Ingresos, creacion, edicion, publicacion, asignacion, revocacion y exportacion.</a:t>
+              <a:t>Ingresos, creación, edición, publicación, asignación, revocación y exportación.</a:t>
             </a:r>
           </a:p>
         </p:txBody>
@@ -19742,7 +19742,7 @@
                 </a:solidFill>
                 <a:latin typeface="Segoe UI"/>
               </a:rPr>
-              <a:t>Que guarda cada renglon</a:t>
+              <a:t>Qué guarda cada renglon</a:t>
             </a:r>
           </a:p>
           <a:p>
@@ -19761,7 +19761,7 @@
                 </a:solidFill>
                 <a:latin typeface="Segoe UI"/>
               </a:rPr>
-              <a:t>Actor, correo, accion, entidad, resumen, fecha, y el estado antes y despues.</a:t>
+              <a:t>Actor, correo, acción, entidad, resumen, fecha, y el estado antes y después.</a:t>
             </a:r>
           </a:p>
         </p:txBody>
@@ -19895,7 +19895,7 @@
                 </a:solidFill>
                 <a:latin typeface="Segoe UI"/>
               </a:rPr>
-              <a:t>Contrasenas</a:t>
+              <a:t>Contraseñas</a:t>
             </a:r>
           </a:p>
           <a:p>
@@ -20048,7 +20048,7 @@
                 </a:solidFill>
                 <a:latin typeface="Segoe UI"/>
               </a:rPr>
-              <a:t>Sesion</a:t>
+              <a:t>Sesión</a:t>
             </a:r>
           </a:p>
           <a:p>
@@ -20373,7 +20373,7 @@
                 </a:solidFill>
                 <a:latin typeface="Segoe UI"/>
               </a:rPr>
-              <a:t>El avance y los intentos no se borran por una edicion administrativa.</a:t>
+              <a:t>El avance y los intentos no se borran por una edición administrativa.</a:t>
             </a:r>
           </a:p>
         </p:txBody>
@@ -20545,7 +20545,7 @@
                 </a:solidFill>
                 <a:latin typeface="Segoe UI"/>
               </a:rPr>
-              <a:t>VISION DE CONJUNTO</a:t>
+              <a:t>VISIÓN DE CONJUNTO</a:t>
             </a:r>
           </a:p>
           <a:p>
@@ -20564,7 +20564,7 @@
                 </a:solidFill>
                 <a:latin typeface="Segoe UI"/>
               </a:rPr>
-              <a:t>Recorrido completo de una capacitacion</a:t>
+              <a:t>Recorrido completo de una capacitación</a:t>
             </a:r>
           </a:p>
           <a:p>
@@ -20625,7 +20625,7 @@
                 </a:solidFill>
                 <a:latin typeface="Segoe UI"/>
               </a:rPr>
-              <a:t>KG Academy  ·  KG Gestion Integral S.A.S.  ·  Desarrollado por Diego Alejandro Hernandez Blanco</a:t>
+              <a:t>KG Academy  ·  KG Gestión Integral S.A.S.  ·  Desarrollado por Diego Alejandro Hernández Blanco</a:t>
             </a:r>
           </a:p>
         </p:txBody>
@@ -21105,7 +21105,7 @@
                 </a:solidFill>
                 <a:latin typeface="Segoe UI"/>
               </a:rPr>
-              <a:t>Por area, cargo y sede.</a:t>
+              <a:t>Por área, cargo y sede.</a:t>
             </a:r>
           </a:p>
         </p:txBody>
@@ -21324,7 +21324,7 @@
                 </a:solidFill>
                 <a:latin typeface="Segoe UI"/>
               </a:rPr>
-              <a:t>Con fecha limite y caracter obligatorio.</a:t>
+              <a:t>Con fecha límite y carácter obligatorio.</a:t>
             </a:r>
           </a:p>
         </p:txBody>
@@ -21762,7 +21762,7 @@
                 </a:solidFill>
                 <a:latin typeface="Segoe UI"/>
               </a:rPr>
-              <a:t>El avance se guarda leccion a leccion.</a:t>
+              <a:t>El avance se guarda lección a lección.</a:t>
             </a:r>
           </a:p>
         </p:txBody>
@@ -21962,7 +21962,7 @@
                 </a:solidFill>
                 <a:latin typeface="Segoe UI"/>
               </a:rPr>
-              <a:t>Presenta la evaluacion final</a:t>
+              <a:t>Presenta la evaluación final</a:t>
             </a:r>
           </a:p>
           <a:p>
@@ -21981,7 +21981,7 @@
                 </a:solidFill>
                 <a:latin typeface="Segoe UI"/>
               </a:rPr>
-              <a:t>Calificacion automatica e inmediata.</a:t>
+              <a:t>Calificación automática e inmediata.</a:t>
             </a:r>
           </a:p>
         </p:txBody>
@@ -22200,7 +22200,7 @@
                 </a:solidFill>
                 <a:latin typeface="Segoe UI"/>
               </a:rPr>
-              <a:t>Codigo unico y QR verificable.</a:t>
+              <a:t>Código único y QR verificable.</a:t>
             </a:r>
           </a:p>
         </p:txBody>
@@ -22919,7 +22919,7 @@
                 </a:solidFill>
                 <a:latin typeface="Segoe UI"/>
               </a:rPr>
-              <a:t>Guia rapida</a:t>
+              <a:t>Guia rápida</a:t>
             </a:r>
           </a:p>
           <a:p>
@@ -22938,7 +22938,7 @@
                 </a:solidFill>
                 <a:latin typeface="Segoe UI"/>
               </a:rPr>
-              <a:t>Cada modulo se explica en tres capas: que hace, como lo hace el sistema y que debe hacer el usuario.</a:t>
+              <a:t>Cada módulo se explica en tres capas: que hace, como lo hace el sistema y que debe hacer el usuario.</a:t>
             </a:r>
           </a:p>
         </p:txBody>
@@ -22980,7 +22980,7 @@
                 </a:solidFill>
                 <a:latin typeface="Segoe UI"/>
               </a:rPr>
-              <a:t>KG Academy  ·  KG Gestion Integral S.A.S.  ·  Desarrollado por Diego Alejandro Hernandez Blanco</a:t>
+              <a:t>KG Academy  ·  KG Gestión Integral S.A.S.  ·  Desarrollado por Diego Alejandro Hernández Blanco</a:t>
             </a:r>
           </a:p>
         </p:txBody>
@@ -23200,7 +23200,7 @@
                 </a:solidFill>
                 <a:latin typeface="Segoe UI"/>
               </a:rPr>
-              <a:t>El objetivo del modulo en una frase, en lenguaje de negocio.</a:t>
+              <a:t>El objetivo del módulo en una frase, en lenguaje de negocio.</a:t>
             </a:r>
           </a:p>
         </p:txBody>
@@ -23514,7 +23514,7 @@
                 </a:solidFill>
                 <a:latin typeface="Segoe UI"/>
               </a:rPr>
-              <a:t>QUIEN LO USA</a:t>
+              <a:t>QUIÉN LO USA</a:t>
             </a:r>
           </a:p>
         </p:txBody>
@@ -23690,7 +23690,7 @@
                 </a:solidFill>
                 <a:latin typeface="Segoe UI"/>
               </a:rPr>
-              <a:t>12 modulos funcionales</a:t>
+              <a:t>12 módulos funcionales</a:t>
             </a:r>
           </a:p>
           <a:p>
@@ -23709,7 +23709,7 @@
                 </a:solidFill>
                 <a:latin typeface="Segoe UI"/>
               </a:rPr>
-              <a:t>Desde el acceso hasta la auditoria.</a:t>
+              <a:t>Desde el acceso hasta la auditoría.</a:t>
             </a:r>
           </a:p>
         </p:txBody>
@@ -24015,7 +24015,7 @@
                 </a:solidFill>
                 <a:latin typeface="Segoe UI"/>
               </a:rPr>
-              <a:t>La NOTA de las evaluaciones y los PUNTOS de gamificacion. No son lo mismo.</a:t>
+              <a:t>La NOTA de las evaluaciones y los PUNTOS de gamificación. No son lo mismo.</a:t>
             </a:r>
           </a:p>
         </p:txBody>
@@ -24149,7 +24149,7 @@
                 </a:solidFill>
                 <a:latin typeface="Segoe UI"/>
               </a:rPr>
-              <a:t>1 regla de aprobacion</a:t>
+              <a:t>1 regla de aprobación</a:t>
             </a:r>
           </a:p>
           <a:p>
@@ -24168,7 +24168,7 @@
                 </a:solidFill>
                 <a:latin typeface="Segoe UI"/>
               </a:rPr>
-              <a:t>Lecciones obligatorias completas + evaluacion final aprobada.</a:t>
+              <a:t>Lecciones obligatorias completas + evaluación final aprobada.</a:t>
             </a:r>
           </a:p>
         </p:txBody>
@@ -24258,7 +24258,7 @@
                 </a:solidFill>
                 <a:latin typeface="Segoe UI"/>
               </a:rPr>
-              <a:t>Advertencia importante: en este manual, NOTA (0 a 100) decide si aprueba. PUNTOS (gamificacion) solo motivan; nunca afectan la aprobacion ni el certificado.</a:t>
+              <a:t>Advertencia importante: en este manual, NOTA (0 a 100) decide si aprueba. PUNTOS (gamificación) solo motivan; nunca afectan la aprobación ni el certificado.</a:t>
             </a:r>
           </a:p>
         </p:txBody>
@@ -24510,7 +24510,7 @@
                 </a:solidFill>
                 <a:latin typeface="Segoe UI"/>
               </a:rPr>
-              <a:t>KG Academy  ·  KG Gestion Integral S.A.S.  ·  Desarrollado por Diego Alejandro Hernandez Blanco</a:t>
+              <a:t>KG Academy  ·  KG Gestión Integral S.A.S.  ·  Desarrollado por Diego Alejandro Hernández Blanco</a:t>
             </a:r>
           </a:p>
         </p:txBody>
@@ -24638,7 +24638,7 @@
                           </a:solidFill>
                           <a:latin typeface="Segoe UI"/>
                         </a:rPr>
-                        <a:t>Matricula (enrollment)</a:t>
+                        <a:t>Matrícula (enrollment)</a:t>
                       </a:r>
                     </a:p>
                   </a:txBody>
@@ -24684,7 +24684,7 @@
                           </a:solidFill>
                           <a:latin typeface="Segoe UI"/>
                         </a:rPr>
-                        <a:t>Asignacion</a:t>
+                        <a:t>Asignación</a:t>
                       </a:r>
                     </a:p>
                   </a:txBody>
@@ -24706,7 +24706,7 @@
                           </a:solidFill>
                           <a:latin typeface="Segoe UI"/>
                         </a:rPr>
-                        <a:t>La orden de la empresa para que un trabajador tome un curso. Tiene fecha limite.</a:t>
+                        <a:t>La orden de la empresa para que un trabajador tome un curso. Tiene fecha límite.</a:t>
                       </a:r>
                     </a:p>
                   </a:txBody>
@@ -24730,7 +24730,7 @@
                           </a:solidFill>
                           <a:latin typeface="Segoe UI"/>
                         </a:rPr>
-                        <a:t>Lote de asignacion</a:t>
+                        <a:t>Lote de asignación</a:t>
                       </a:r>
                     </a:p>
                   </a:txBody>
@@ -24798,7 +24798,7 @@
                           </a:solidFill>
                           <a:latin typeface="Segoe UI"/>
                         </a:rPr>
-                        <a:t>Cada vez que alguien envia una evaluacion. Se guardan todos, no solo el mejor.</a:t>
+                        <a:t>Cada vez que alguien envia una evaluación. Se guardan todos, no solo el mejor.</a:t>
                       </a:r>
                     </a:p>
                   </a:txBody>
@@ -24844,7 +24844,7 @@
                           </a:solidFill>
                           <a:latin typeface="Segoe UI"/>
                         </a:rPr>
-                        <a:t>Calificacion de 0 a 100 de una evaluacion. Decide la aprobacion.</a:t>
+                        <a:t>Calificación de 0 a 100 de una evaluación. Decide la aprobación.</a:t>
                       </a:r>
                     </a:p>
                   </a:txBody>
@@ -24890,7 +24890,7 @@
                           </a:solidFill>
                           <a:latin typeface="Segoe UI"/>
                         </a:rPr>
-                        <a:t>Marcador de gamificacion. No decide nada academico.</a:t>
+                        <a:t>Marcador de gamificación. No decide nada academico.</a:t>
                       </a:r>
                     </a:p>
                   </a:txBody>
@@ -24914,7 +24914,7 @@
                           </a:solidFill>
                           <a:latin typeface="Segoe UI"/>
                         </a:rPr>
-                        <a:t>Codigo de verificacion</a:t>
+                        <a:t>Código de verificación</a:t>
                       </a:r>
                     </a:p>
                   </a:txBody>
@@ -24936,7 +24936,7 @@
                           </a:solidFill>
                           <a:latin typeface="Segoe UI"/>
                         </a:rPr>
-                        <a:t>Identificador unico del certificado, formato KG-AAAA-XXXXXX.</a:t>
+                        <a:t>Identificador único del certificado, formato KG-AAAA-XXXXXX.</a:t>
                       </a:r>
                     </a:p>
                   </a:txBody>
@@ -24982,7 +24982,7 @@
                           </a:solidFill>
                           <a:latin typeface="Segoe UI"/>
                         </a:rPr>
-                        <a:t>La informacion que queda fija en el certificado al emitirlo.</a:t>
+                        <a:t>La información que queda fija en el certificado al emitirlo.</a:t>
                       </a:r>
                     </a:p>
                   </a:txBody>
@@ -25100,7 +25100,7 @@
                           </a:solidFill>
                           <a:latin typeface="Segoe UI"/>
                         </a:rPr>
-                        <a:t>borrador · revision · publicado · despublicado · archivado</a:t>
+                        <a:t>borrador · revisión · publicado · despublicado · archivado</a:t>
                       </a:r>
                     </a:p>
                   </a:txBody>
@@ -25124,7 +25124,7 @@
                           </a:solidFill>
                           <a:latin typeface="Segoe UI"/>
                         </a:rPr>
-                        <a:t>Matricula</a:t>
+                        <a:t>Matrícula</a:t>
                       </a:r>
                     </a:p>
                   </a:txBody>
@@ -25170,7 +25170,7 @@
                           </a:solidFill>
                           <a:latin typeface="Segoe UI"/>
                         </a:rPr>
-                        <a:t>Asignacion</a:t>
+                        <a:t>Asignación</a:t>
                       </a:r>
                     </a:p>
                   </a:txBody>
@@ -25216,7 +25216,7 @@
                           </a:solidFill>
                           <a:latin typeface="Segoe UI"/>
                         </a:rPr>
-                        <a:t>Leccion</a:t>
+                        <a:t>Lección</a:t>
                       </a:r>
                     </a:p>
                   </a:txBody>
@@ -25376,7 +25376,7 @@
                           </a:solidFill>
                           <a:latin typeface="Segoe UI"/>
                         </a:rPr>
-                        <a:t>activo · pendiente de activacion · inactivo · bloqueado</a:t>
+                        <a:t>activo · pendiente de activación · inactivo · bloqueado</a:t>
                       </a:r>
                     </a:p>
                   </a:txBody>
@@ -25623,7 +25623,7 @@
                 </a:solidFill>
                 <a:latin typeface="Segoe UI"/>
               </a:rPr>
-              <a:t>Que esta listo y que falta definir</a:t>
+              <a:t>Qué está listo y que falta definir</a:t>
             </a:r>
           </a:p>
           <a:p>
@@ -25684,7 +25684,7 @@
                 </a:solidFill>
                 <a:latin typeface="Segoe UI"/>
               </a:rPr>
-              <a:t>KG Academy  ·  KG Gestion Integral S.A.S.  ·  Desarrollado por Diego Alejandro Hernandez Blanco</a:t>
+              <a:t>KG Academy  ·  KG Gestión Integral S.A.S.  ·  Desarrollado por Diego Alejandro Hernández Blanco</a:t>
             </a:r>
           </a:p>
         </p:txBody>
@@ -26026,7 +26026,7 @@
                 </a:solidFill>
                 <a:latin typeface="Segoe UI"/>
               </a:rPr>
-              <a:t>Catalogo, ficha de curso y matricula</a:t>
+              <a:t>Catálogo, ficha de curso y matrícula</a:t>
             </a:r>
           </a:p>
         </p:txBody>
@@ -26112,7 +26112,7 @@
                 </a:solidFill>
                 <a:latin typeface="Segoe UI"/>
               </a:rPr>
-              <a:t>Aula virtual con progreso leccion a leccion</a:t>
+              <a:t>Aula virtual con progreso lección a lección</a:t>
             </a:r>
           </a:p>
         </p:txBody>
@@ -26284,7 +26284,7 @@
                 </a:solidFill>
                 <a:latin typeface="Segoe UI"/>
               </a:rPr>
-              <a:t>Evaluaciones con calificacion automatica y retroalimentacion</a:t>
+              <a:t>Evaluaciones con calificación automática y retroalimentacion</a:t>
             </a:r>
           </a:p>
         </p:txBody>
@@ -26370,7 +26370,7 @@
                 </a:solidFill>
                 <a:latin typeface="Segoe UI"/>
               </a:rPr>
-              <a:t>Certificados automaticos con QR y verificacion publica</a:t>
+              <a:t>Certificados automáticos con QR y verificación pública</a:t>
             </a:r>
           </a:p>
         </p:txBody>
@@ -26456,7 +26456,7 @@
                 </a:solidFill>
                 <a:latin typeface="Segoe UI"/>
               </a:rPr>
-              <a:t>Panel empresarial con asignacion masiva y seguimiento</a:t>
+              <a:t>Panel empresarial con asignación masiva y seguimiento</a:t>
             </a:r>
           </a:p>
         </p:txBody>
@@ -26542,7 +26542,7 @@
                 </a:solidFill>
                 <a:latin typeface="Segoe UI"/>
               </a:rPr>
-              <a:t>Reportes CSV y panel de administracion KG</a:t>
+              <a:t>Reportes CSV y panel de administración KG</a:t>
             </a:r>
           </a:p>
         </p:txBody>
@@ -26628,7 +26628,7 @@
                 </a:solidFill>
                 <a:latin typeface="Segoe UI"/>
               </a:rPr>
-              <a:t>Gamificacion de puntos, niveles y rachas</a:t>
+              <a:t>Gamificación de puntos, niveles y rachas</a:t>
             </a:r>
           </a:p>
         </p:txBody>
@@ -26714,7 +26714,7 @@
                 </a:solidFill>
                 <a:latin typeface="Segoe UI"/>
               </a:rPr>
-              <a:t>Auditoria de acciones relevantes</a:t>
+              <a:t>Auditoría de acciones relevantes</a:t>
             </a:r>
           </a:p>
         </p:txBody>
@@ -27282,7 +27282,7 @@
                 </a:solidFill>
                 <a:latin typeface="Segoe UI"/>
               </a:rPr>
-              <a:t>Entrega automatica de insignias</a:t>
+              <a:t>Entrega automática de insignias</a:t>
             </a:r>
           </a:p>
           <a:p>
@@ -27301,7 +27301,7 @@
                 </a:solidFill>
                 <a:latin typeface="Segoe UI"/>
               </a:rPr>
-              <a:t>El catalogo existe; falta la regla que las otorga sola.</a:t>
+              <a:t>El catálogo existe; falta la regla que las otorga sola.</a:t>
             </a:r>
           </a:p>
         </p:txBody>
@@ -27391,7 +27391,7 @@
                 </a:solidFill>
                 <a:latin typeface="Segoe UI"/>
               </a:rPr>
-              <a:t>Edicion de usuarios desde la interfaz</a:t>
+              <a:t>Edición de usuarios desde la interfaz</a:t>
             </a:r>
           </a:p>
           <a:p>
@@ -27620,7 +27620,7 @@
                 </a:solidFill>
                 <a:latin typeface="Segoe UI"/>
               </a:rPr>
-              <a:t>KG GESTION INTEGRAL S.A.S.  ·  KATERINE GUANARITA</a:t>
+              <a:t>KG GESTIÓN INTEGRAL S.A.S.  ·  KATERINE GUAÑARITA</a:t>
             </a:r>
           </a:p>
         </p:txBody>
@@ -27708,7 +27708,7 @@
                 </a:solidFill>
                 <a:latin typeface="Segoe UI"/>
               </a:rPr>
-              <a:t>Disenado y desarrollado por Diego Alejandro Hernandez Blanco</a:t>
+              <a:t>Diseñado y desarrollado por Diego Alejandro Hernández Blanco</a:t>
             </a:r>
           </a:p>
         </p:txBody>
@@ -27899,7 +27899,7 @@
                 </a:solidFill>
                 <a:latin typeface="Segoe UI"/>
               </a:rPr>
-              <a:t>Los 12 modulos de la plataforma</a:t>
+              <a:t>Los 12 módulos de la plataforma</a:t>
             </a:r>
           </a:p>
           <a:p>
@@ -27960,7 +27960,7 @@
                 </a:solidFill>
                 <a:latin typeface="Segoe UI"/>
               </a:rPr>
-              <a:t>KG Academy  ·  KG Gestion Integral S.A.S.  ·  Desarrollado por Diego Alejandro Hernandez Blanco</a:t>
+              <a:t>KG Academy  ·  KG Gestión Integral S.A.S.  ·  Desarrollado por Diego Alejandro Hernández Blanco</a:t>
             </a:r>
           </a:p>
         </p:txBody>
@@ -28166,7 +28166,7 @@
                 </a:solidFill>
                 <a:latin typeface="Segoe UI"/>
               </a:rPr>
-              <a:t>Registro, ingreso, sesion y recuperacion de contrasena</a:t>
+              <a:t>Registro, ingreso, sesión y recuperación de contraseña</a:t>
             </a:r>
           </a:p>
         </p:txBody>
@@ -28256,7 +28256,7 @@
                 </a:solidFill>
                 <a:latin typeface="Segoe UI"/>
               </a:rPr>
-              <a:t>02  Catalogo</a:t>
+              <a:t>02  Catálogo</a:t>
             </a:r>
           </a:p>
           <a:p>
@@ -28384,7 +28384,7 @@
                 </a:solidFill>
                 <a:latin typeface="Segoe UI"/>
               </a:rPr>
-              <a:t>Estudiar leccion a leccion con el avance guardado</a:t>
+              <a:t>Estudiar lección a lección con el avance guardado</a:t>
             </a:r>
           </a:p>
         </p:txBody>
@@ -28493,7 +28493,7 @@
                 </a:solidFill>
                 <a:latin typeface="Segoe UI"/>
               </a:rPr>
-              <a:t>Diagnostica, por modulo y final, con calificacion inmediata</a:t>
+              <a:t>Diagnóstica, por módulo y final, con calificación inmediata</a:t>
             </a:r>
           </a:p>
         </p:txBody>
@@ -28602,7 +28602,7 @@
                 </a:solidFill>
                 <a:latin typeface="Segoe UI"/>
               </a:rPr>
-              <a:t>Descarga en PDF y verificacion publica con QR</a:t>
+              <a:t>Descarga en PDF y verificación pública con QR</a:t>
             </a:r>
           </a:p>
         </p:txBody>
@@ -28692,7 +28692,7 @@
                 </a:solidFill>
                 <a:latin typeface="Segoe UI"/>
               </a:rPr>
-              <a:t>06  Gamificacion</a:t>
+              <a:t>06  Gamificación</a:t>
             </a:r>
           </a:p>
           <a:p>
@@ -28875,7 +28875,7 @@
                 </a:solidFill>
                 <a:latin typeface="Segoe UI"/>
               </a:rPr>
-              <a:t>Nomina por area, cargo y sede; alta individual o masiva</a:t>
+              <a:t>Nomina por área, cargo y sede; alta individual o masiva</a:t>
             </a:r>
           </a:p>
         </p:txBody>
@@ -28965,7 +28965,7 @@
                 </a:solidFill>
                 <a:latin typeface="Segoe UI"/>
               </a:rPr>
-              <a:t>08  Asignacion</a:t>
+              <a:t>08  Asignación</a:t>
             </a:r>
           </a:p>
           <a:p>
@@ -28984,7 +28984,7 @@
                 </a:solidFill>
                 <a:latin typeface="Segoe UI"/>
               </a:rPr>
-              <a:t>Entregar cursos con fecha limite y caracter obligatorio</a:t>
+              <a:t>Entregar cursos con fecha límite y carácter obligatorio</a:t>
             </a:r>
           </a:p>
         </p:txBody>
@@ -29093,7 +29093,7 @@
                 </a:solidFill>
                 <a:latin typeface="Segoe UI"/>
               </a:rPr>
-              <a:t>Estado de cada persona y exportacion a CSV</a:t>
+              <a:t>Estado de cada persona y exportación a CSV</a:t>
             </a:r>
           </a:p>
         </p:txBody>
@@ -29183,7 +29183,7 @@
                 </a:solidFill>
                 <a:latin typeface="Segoe UI"/>
               </a:rPr>
-              <a:t>10  Administracion KG</a:t>
+              <a:t>10  Administración KG</a:t>
             </a:r>
           </a:p>
           <a:p>
@@ -29311,7 +29311,7 @@
                 </a:solidFill>
                 <a:latin typeface="Segoe UI"/>
               </a:rPr>
-              <a:t>Avisos automaticos al trabajador</a:t>
+              <a:t>Avisos automáticos al trabajador</a:t>
             </a:r>
           </a:p>
         </p:txBody>
@@ -29401,7 +29401,7 @@
                 </a:solidFill>
                 <a:latin typeface="Segoe UI"/>
               </a:rPr>
-              <a:t>12  Auditoria y seguridad</a:t>
+              <a:t>12  Auditoría y seguridad</a:t>
             </a:r>
           </a:p>
           <a:p>
@@ -29420,7 +29420,7 @@
                 </a:solidFill>
                 <a:latin typeface="Segoe UI"/>
               </a:rPr>
-              <a:t>Quien hizo que, cuando y sobre que registro</a:t>
+              <a:t>Quién hizo que, cuando y sobre que registro</a:t>
             </a:r>
           </a:p>
         </p:txBody>
@@ -29630,7 +29630,7 @@
                 </a:solidFill>
                 <a:latin typeface="Segoe UI"/>
               </a:rPr>
-              <a:t>El rol se asigna al crear la cuenta y determina a que panel entra el usuario al iniciar sesion.</a:t>
+              <a:t>El rol se asigna al crear la cuenta y determina a que panel entra el usuario al iniciar sesión.</a:t>
             </a:r>
           </a:p>
         </p:txBody>
@@ -29672,7 +29672,7 @@
                 </a:solidFill>
                 <a:latin typeface="Segoe UI"/>
               </a:rPr>
-              <a:t>KG Academy  ·  KG Gestion Integral S.A.S.  ·  Desarrollado por Diego Alejandro Hernandez Blanco</a:t>
+              <a:t>KG Academy  ·  KG Gestión Integral S.A.S.  ·  Desarrollado por Diego Alejandro Hernández Blanco</a:t>
             </a:r>
           </a:p>
         </p:txBody>
@@ -29801,7 +29801,7 @@
                           </a:solidFill>
                           <a:latin typeface="Segoe UI"/>
                         </a:rPr>
-                        <a:t>Que puede hacer</a:t>
+                        <a:t>Qué puede hacer</a:t>
                       </a:r>
                     </a:p>
                   </a:txBody>
@@ -29845,7 +29845,7 @@
                           </a:solidFill>
                           <a:latin typeface="Segoe UI"/>
                         </a:rPr>
-                        <a:t>Quien lo usa</a:t>
+                        <a:t>Quién lo usa</a:t>
                       </a:r>
                     </a:p>
                   </a:txBody>
@@ -30025,7 +30025,7 @@
                           </a:solidFill>
                           <a:latin typeface="Segoe UI"/>
                         </a:rPr>
-                        <a:t>Opera cursos, usuarios, empresas, certificados y reportes; no toca configuracion sensible</a:t>
+                        <a:t>Opera cursos, usuarios, empresas, certificados y reportes; no toca configuración sensible</a:t>
                       </a:r>
                     </a:p>
                   </a:txBody>
@@ -30405,7 +30405,7 @@
                           </a:solidFill>
                           <a:latin typeface="Segoe UI"/>
                         </a:rPr>
-                        <a:t>Jefe de area o HSE</a:t>
+                        <a:t>Jefe de área o HSE</a:t>
                       </a:r>
                     </a:p>
                   </a:txBody>
@@ -30617,7 +30617,7 @@
                 </a:solidFill>
                 <a:latin typeface="Segoe UI"/>
               </a:rPr>
-              <a:t>Regla de aislamiento: un administrador de empresa NUNCA ve datos de otra empresa. El sistema lo valida en el servidor en cada consulta, no solo escondiendo botones en pantalla.</a:t>
+              <a:t>Regla de aislamiento: un administrador de empresa NUNCA ve datos de otra empresa. El sistema lo válida en el servidor en cada consulta, no solo escondiendo botones en pantalla.</a:t>
             </a:r>
           </a:p>
         </p:txBody>
@@ -30808,7 +30808,7 @@
                 </a:solidFill>
                 <a:latin typeface="Segoe UI"/>
               </a:rPr>
-              <a:t>Como se controla el permiso en la practica</a:t>
+              <a:t>Como se controla el permiso en la práctica</a:t>
             </a:r>
           </a:p>
           <a:p>
@@ -30827,7 +30827,7 @@
                 </a:solidFill>
                 <a:latin typeface="Segoe UI"/>
               </a:rPr>
-              <a:t>Tres barreras independientes. Si una falla, las otras siguen protegiendo la informacion.</a:t>
+              <a:t>Tres barreras independientes. Si una falla, las otras siguen protegiendo la información.</a:t>
             </a:r>
           </a:p>
         </p:txBody>
@@ -30869,7 +30869,7 @@
                 </a:solidFill>
                 <a:latin typeface="Segoe UI"/>
               </a:rPr>
-              <a:t>KG Academy  ·  KG Gestion Integral S.A.S.  ·  Desarrollado por Diego Alejandro Hernandez Blanco</a:t>
+              <a:t>KG Academy  ·  KG Gestión Integral S.A.S.  ·  Desarrollado por Diego Alejandro Hernández Blanco</a:t>
             </a:r>
           </a:p>
         </p:txBody>
@@ -31216,7 +31216,7 @@
                 </a:solidFill>
                 <a:latin typeface="Segoe UI"/>
               </a:rPr>
-              <a:t>Barrera de pagina</a:t>
+              <a:t>Barrera de página</a:t>
             </a:r>
           </a:p>
           <a:p>
@@ -31397,7 +31397,7 @@
                 </a:solidFill>
                 <a:latin typeface="Segoe UI"/>
               </a:rPr>
-              <a:t>Cada consulta filtra por la empresa del usuario. Aunque alguien adivine el identificador de otro trabajador, no obtiene la informacion.</a:t>
+              <a:t>Cada consulta filtra por la empresa del usuario. Aunque alguien adivine el identificador de otro trabajador, no obtiene la información.</a:t>
             </a:r>
           </a:p>
         </p:txBody>
@@ -31485,7 +31485,7 @@
                 </a:solidFill>
                 <a:latin typeface="Segoe UI"/>
               </a:rPr>
-              <a:t>EN NUMEROS</a:t>
+              <a:t>EN NÚMEROS</a:t>
             </a:r>
           </a:p>
           <a:p>
@@ -31542,7 +31542,7 @@
                 </a:solidFill>
                 <a:latin typeface="Segoe UI"/>
               </a:rPr>
-              <a:t>9 modulos protegidos</a:t>
+              <a:t>9 módulos protegidos</a:t>
             </a:r>
           </a:p>
           <a:p>
@@ -31561,7 +31561,7 @@
                 </a:solidFill>
                 <a:latin typeface="Segoe UI"/>
               </a:rPr>
-              <a:t>Los permisos se nombran modulo.accion, por ejemplo cursos.publicar o certificados.revocar.</a:t>
+              <a:t>Los permisos se nombran módulo.acción, por ejemplo cursos.publicar o certificados.revocar.</a:t>
             </a:r>
           </a:p>
         </p:txBody>
@@ -31651,7 +31651,7 @@
                 </a:solidFill>
                 <a:latin typeface="Segoe UI"/>
               </a:rPr>
-              <a:t>La matriz completa rol por permiso se consulta en la plataforma: Administracion  →  Matriz de permisos.</a:t>
+              <a:t>La matriz completa rol por permiso se consulta en la plataforma: Administración  →  Matriz de permisos.</a:t>
             </a:r>
           </a:p>
         </p:txBody>
@@ -31712,7 +31712,7 @@
                 </a:solidFill>
                 <a:latin typeface="Segoe UI"/>
               </a:rPr>
-              <a:t>activo  ·  puede entrar y estudiar          pendiente_activacion  ·  creado por la empresa, aun no ha entrado          inactivo  ·  se conserva el historico pero no puede entrar          bloqueado  ·  acceso denegado por decision administrativa</a:t>
+              <a:t>activo  ·  puede entrar y estudiar          pendiente_activacion  ·  creado por la empresa, aún no ha entrado          inactivo  ·  se conserva el histórico pero no puede entrar          bloqueado  ·  acceso denegado por decision administrativa</a:t>
             </a:r>
           </a:p>
         </p:txBody>
@@ -31884,7 +31884,7 @@
                 </a:solidFill>
                 <a:latin typeface="Segoe UI"/>
               </a:rPr>
-              <a:t>MODULO 01</a:t>
+              <a:t>MÓDULO 01</a:t>
             </a:r>
           </a:p>
           <a:p>
@@ -31922,7 +31922,7 @@
                 </a:solidFill>
                 <a:latin typeface="Segoe UI"/>
               </a:rPr>
-              <a:t>Como entra una persona a KG Academy y como se protege su sesion.</a:t>
+              <a:t>Como entra una persona a KG Academy y como se protege su sesión.</a:t>
             </a:r>
           </a:p>
         </p:txBody>
@@ -31964,7 +31964,7 @@
                 </a:solidFill>
                 <a:latin typeface="Segoe UI"/>
               </a:rPr>
-              <a:t>KG Academy  ·  KG Gestion Integral S.A.S.  ·  Desarrollado por Diego Alejandro Hernandez Blanco</a:t>
+              <a:t>KG Academy  ·  KG Gestión Integral S.A.S.  ·  Desarrollado por Diego Alejandro Hernández Blanco</a:t>
             </a:r>
           </a:p>
         </p:txBody>
@@ -32142,7 +32142,7 @@
                 </a:solidFill>
                 <a:latin typeface="Segoe UI"/>
               </a:rPr>
-              <a:t>Registro publico</a:t>
+              <a:t>Registro público</a:t>
             </a:r>
           </a:p>
         </p:txBody>
@@ -32362,7 +32362,7 @@
                 </a:solidFill>
                 <a:latin typeface="Segoe UI"/>
               </a:rPr>
-              <a:t>Talento humano crea al trabajador desde el panel. Nace con contrasena temporal KgAcademy2026* y estado 'pendiente de activacion'.</a:t>
+              <a:t>Talento humano crea al trabajador desde el panel. Nace con contraseña temporal KgAcademy2026* y estado 'pendiente de activación'.</a:t>
             </a:r>
           </a:p>
         </p:txBody>
@@ -32540,7 +32540,7 @@
                 </a:solidFill>
                 <a:latin typeface="Segoe UI"/>
               </a:rPr>
-              <a:t>La administracion crea cuentas de staff, instructores o administradores de empresa.</a:t>
+              <a:t>La administración crea cuentas de staff, instructores o administradores de empresa.</a:t>
             </a:r>
           </a:p>
         </p:txBody>
@@ -32582,7 +32582,7 @@
                 </a:solidFill>
                 <a:latin typeface="Segoe UI"/>
               </a:rPr>
-              <a:t>QUE PASA CUANDO ALGUIEN INICIA SESION</a:t>
+              <a:t>QUE PASA CUANDO ALGUIEN INICIA SESIÓN</a:t>
             </a:r>
           </a:p>
         </p:txBody>
@@ -32725,7 +32725,7 @@
                 </a:solidFill>
                 <a:latin typeface="Segoe UI"/>
               </a:rPr>
-              <a:t>Se valida la contrasena</a:t>
+              <a:t>Se válida la contraseña</a:t>
             </a:r>
           </a:p>
           <a:p>
@@ -32744,7 +32744,7 @@
                 </a:solidFill>
                 <a:latin typeface="Segoe UI"/>
               </a:rPr>
-              <a:t>Se compara contra el hash bcrypt guardado. La contrasena real nunca se almacena.</a:t>
+              <a:t>Se compara contra el hash bcrypt guardado. La contraseña real nunca se almacena.</a:t>
             </a:r>
           </a:p>
         </p:txBody>
@@ -32906,7 +32906,7 @@
                 </a:solidFill>
                 <a:latin typeface="Segoe UI"/>
               </a:rPr>
-              <a:t>Una cuenta bloqueada o inactiva no puede entrar, aunque la contrasena sea correcta.</a:t>
+              <a:t>Una cuenta bloqueada o inactiva no puede entrar, aunque la contraseña sea correcta.</a:t>
             </a:r>
           </a:p>
         </p:txBody>
@@ -33049,7 +33049,7 @@
                 </a:solidFill>
                 <a:latin typeface="Segoe UI"/>
               </a:rPr>
-              <a:t>Se crea la sesion</a:t>
+              <a:t>Se crea la sesión</a:t>
             </a:r>
           </a:p>
           <a:p>
@@ -33068,7 +33068,7 @@
                 </a:solidFill>
                 <a:latin typeface="Segoe UI"/>
               </a:rPr>
-              <a:t>Se firma un token JWT valido por 8 horas y se guarda en una cookie que el navegador no puede leer por script.</a:t>
+              <a:t>Se firma un token JWT válido por 8 horas y se guarda en una cookie que el navegador no puede leer por script.</a:t>
             </a:r>
           </a:p>
         </p:txBody>
@@ -33230,7 +33230,7 @@
                 </a:solidFill>
                 <a:latin typeface="Segoe UI"/>
               </a:rPr>
-              <a:t>Se actualiza la fecha de ultimo ingreso, se suma al contador y queda un renglon en auditoria.</a:t>
+              <a:t>Se actualiza la fecha de último ingreso, se suma al contador y queda un renglon en auditoría.</a:t>
             </a:r>
           </a:p>
         </p:txBody>
@@ -33373,7 +33373,7 @@
                 </a:solidFill>
                 <a:latin typeface="Segoe UI"/>
               </a:rPr>
-              <a:t>Se redirige segun el rol</a:t>
+              <a:t>Se redirige según el rol</a:t>
             </a:r>
           </a:p>
           <a:p>
@@ -33392,7 +33392,7 @@
                 </a:solidFill>
                 <a:latin typeface="Segoe UI"/>
               </a:rPr>
-              <a:t>Estudiante al aula, empresa a su panel, KG a la administracion.</a:t>
+              <a:t>Estudiante al aula, empresa a su panel, KG a la administración.</a:t>
             </a:r>
           </a:p>
         </p:txBody>
@@ -33564,7 +33564,7 @@
                 </a:solidFill>
                 <a:latin typeface="Segoe UI"/>
               </a:rPr>
-              <a:t>MODULOS 02 Y 03</a:t>
+              <a:t>MÓDULOS 02 Y 03</a:t>
             </a:r>
           </a:p>
           <a:p>
@@ -33583,7 +33583,7 @@
                 </a:solidFill>
                 <a:latin typeface="Segoe UI"/>
               </a:rPr>
-              <a:t>Catalogo y estructura de un curso</a:t>
+              <a:t>Catálogo y estructura de un curso</a:t>
             </a:r>
           </a:p>
           <a:p>
@@ -33644,7 +33644,7 @@
                 </a:solidFill>
                 <a:latin typeface="Segoe UI"/>
               </a:rPr>
-              <a:t>KG Academy  ·  KG Gestion Integral S.A.S.  ·  Desarrollado por Diego Alejandro Hernandez Blanco</a:t>
+              <a:t>KG Academy  ·  KG Gestión Integral S.A.S.  ·  Desarrollado por Diego Alejandro Hernández Blanco</a:t>
             </a:r>
           </a:p>
         </p:txBody>
@@ -33816,7 +33816,7 @@
                 </a:solidFill>
                 <a:latin typeface="Segoe UI"/>
               </a:rPr>
-              <a:t>CATEGORIA</a:t>
+              <a:t>CATEGORÍA</a:t>
             </a:r>
           </a:p>
           <a:p>
@@ -33942,7 +33942,7 @@
                 </a:solidFill>
                 <a:latin typeface="Segoe UI"/>
               </a:rPr>
-              <a:t>Ficha, reglas de aprobacion y certificado. Ej: KG-PA-001</a:t>
+              <a:t>Ficha, reglas de aprobación y certificado. Ej: KG-PA-001</a:t>
             </a:r>
           </a:p>
         </p:txBody>
@@ -34030,7 +34030,7 @@
                 </a:solidFill>
                 <a:latin typeface="Segoe UI"/>
               </a:rPr>
-              <a:t>MODULO</a:t>
+              <a:t>MÓDULO</a:t>
             </a:r>
           </a:p>
           <a:p>
@@ -34137,7 +34137,7 @@
                 </a:solidFill>
                 <a:latin typeface="Segoe UI"/>
               </a:rPr>
-              <a:t>LECCION</a:t>
+              <a:t>LECCIÓN</a:t>
             </a:r>
           </a:p>
           <a:p>
@@ -34156,7 +34156,7 @@
                 </a:solidFill>
                 <a:latin typeface="Segoe UI"/>
               </a:rPr>
-              <a:t>Unidad minima. Aqui vive el contenido y aqui se mide el avance</a:t>
+              <a:t>Unidad mínima. Aquí vive el contenido y aquí se mide el avance</a:t>
             </a:r>
           </a:p>
         </p:txBody>
@@ -34263,7 +34263,7 @@
                 </a:solidFill>
                 <a:latin typeface="Segoe UI"/>
               </a:rPr>
-              <a:t>Anexos descargables de la leccion (PDF, plantillas, normas)</a:t>
+              <a:t>Anexos descargables de la lección (PDF, plantillas, normas)</a:t>
             </a:r>
           </a:p>
         </p:txBody>
@@ -34305,7 +34305,7 @@
                 </a:solidFill>
                 <a:latin typeface="Segoe UI"/>
               </a:rPr>
-              <a:t>TIPOS DE CONTENIDO QUE ACEPTA UNA LECCION</a:t>
+              <a:t>TIPOS DE CONTENIDO QUE ACEPTA UNA LECCIÓN</a:t>
             </a:r>
           </a:p>
         </p:txBody>
@@ -34437,7 +34437,7 @@
                 </a:solidFill>
                 <a:latin typeface="Segoe UI"/>
               </a:rPr>
-              <a:t>Sin material aun. Muestra el espacio reservado de KG</a:t>
+              <a:t>Sin material aún. Muestra el espacio reservado de KG</a:t>
             </a:r>
           </a:p>
         </p:txBody>
@@ -35229,7 +35229,7 @@
                 </a:solidFill>
                 <a:latin typeface="Segoe UI"/>
               </a:rPr>
-              <a:t>Paquete de e-learning estandar</a:t>
+              <a:t>Paquete de e-learning estándar</a:t>
             </a:r>
           </a:p>
         </p:txBody>
@@ -35319,7 +35319,7 @@
                 </a:solidFill>
                 <a:latin typeface="Segoe UI"/>
               </a:rPr>
-              <a:t>Estados de un curso:  borrador  →  revision  →  publicado  →  despublicado  →  archivado. Solo un curso publicado aparece en el catalogo publico.</a:t>
+              <a:t>Estados de un curso:  borrador  →  revisión  →  publicado  →  despublicado  →  archivado. Solo un curso publicado aparece en el catálogo público.</a:t>
             </a:r>
           </a:p>
         </p:txBody>
@@ -35491,7 +35491,7 @@
                 </a:solidFill>
                 <a:latin typeface="Segoe UI"/>
               </a:rPr>
-              <a:t>MODULO 03</a:t>
+              <a:t>MÓDULO 03</a:t>
             </a:r>
           </a:p>
           <a:p>
@@ -35510,7 +35510,7 @@
                 </a:solidFill>
                 <a:latin typeface="Segoe UI"/>
               </a:rPr>
-              <a:t>Como carga KG el contenido de una leccion</a:t>
+              <a:t>Como carga KG el contenido de una lección</a:t>
             </a:r>
           </a:p>
           <a:p>
@@ -35529,7 +35529,7 @@
                 </a:solidFill>
                 <a:latin typeface="Segoe UI"/>
               </a:rPr>
-              <a:t>Procedimiento operativo. No requiere programador ni tocar el codigo.</a:t>
+              <a:t>Procedimiento operativo. No requiere programador ni tocar el código.</a:t>
             </a:r>
           </a:p>
         </p:txBody>
@@ -35571,7 +35571,7 @@
                 </a:solidFill>
                 <a:latin typeface="Segoe UI"/>
               </a:rPr>
-              <a:t>KG Academy  ·  KG Gestion Integral S.A.S.  ·  Desarrollado por Diego Alejandro Hernandez Blanco</a:t>
+              <a:t>KG Academy  ·  KG Gestión Integral S.A.S.  ·  Desarrollado por Diego Alejandro Hernández Blanco</a:t>
             </a:r>
           </a:p>
         </p:txBody>
@@ -36080,7 +36080,7 @@
                 </a:solidFill>
                 <a:latin typeface="Segoe UI"/>
               </a:rPr>
-              <a:t>Elegir el tipo de contenido de la leccion</a:t>
+              <a:t>Elegir el tipo de contenido de la lección</a:t>
             </a:r>
           </a:p>
           <a:p>
@@ -36423,7 +36423,7 @@
                 </a:solidFill>
                 <a:latin typeface="Segoe UI"/>
               </a:rPr>
-              <a:t>La leccion pasa de 'contenido pendiente' a 'contenido cargado' y se publica automaticamente.</a:t>
+              <a:t>La lección pasa de 'contenido pendiente' a 'contenido cargado' y se pública automaticamente.</a:t>
             </a:r>
           </a:p>
         </p:txBody>
@@ -36585,7 +36585,7 @@
                 </a:solidFill>
                 <a:latin typeface="Segoe UI"/>
               </a:rPr>
-              <a:t>Panel derecho del constructor: borrador, revision, publicado o despublicado.</a:t>
+              <a:t>Panel derecho del constructor: borrador, revisión, publicado o despublicado.</a:t>
             </a:r>
           </a:p>
         </p:txBody>
@@ -36692,7 +36692,7 @@
                 </a:solidFill>
                 <a:latin typeface="Segoe UI"/>
               </a:rPr>
-              <a:t>Cada cambio de contenido se guarda en auditoria con:</a:t>
+              <a:t>Cada cambio de contenido se guarda en auditoría con:</a:t>
             </a:r>
           </a:p>
           <a:p>
@@ -36711,7 +36711,7 @@
                 </a:solidFill>
                 <a:latin typeface="Segoe UI"/>
               </a:rPr>
-              <a:t>·  Quien lo hizo</a:t>
+              <a:t>·  Quién lo hizo</a:t>
             </a:r>
           </a:p>
           <a:p>
@@ -36768,7 +36768,7 @@
                 </a:solidFill>
                 <a:latin typeface="Segoe UI"/>
               </a:rPr>
-              <a:t>·  Que quedo despues</a:t>
+              <a:t>·  Que quedo después</a:t>
             </a:r>
           </a:p>
         </p:txBody>
@@ -36948,7 +36948,7 @@
                 </a:solidFill>
                 <a:latin typeface="Segoe UI"/>
               </a:rPr>
-              <a:t>Mientras una leccion este en 'pendiente', el estudiante ve un espacio reservado con la marca KG, no un error.</a:t>
+              <a:t>Mientras una lección este en 'pendiente', el estudiante ve un espacio reservado con la marca KG, no un error.</a:t>
             </a:r>
           </a:p>
         </p:txBody>
@@ -37120,7 +37120,7 @@
                 </a:solidFill>
                 <a:latin typeface="Segoe UI"/>
               </a:rPr>
-              <a:t>MODULO 04</a:t>
+              <a:t>MÓDULO 04</a:t>
             </a:r>
           </a:p>
           <a:p>
@@ -37200,7 +37200,7 @@
                 </a:solidFill>
                 <a:latin typeface="Segoe UI"/>
               </a:rPr>
-              <a:t>KG Academy  ·  KG Gestion Integral S.A.S.  ·  Desarrollado por Diego Alejandro Hernandez Blanco</a:t>
+              <a:t>KG Academy  ·  KG Gestión Integral S.A.S.  ·  Desarrollado por Diego Alejandro Hernández Blanco</a:t>
             </a:r>
           </a:p>
         </p:txBody>
@@ -37395,7 +37395,7 @@
                 </a:solidFill>
                 <a:latin typeface="Segoe UI"/>
               </a:rPr>
-              <a:t>Modulos, lecciones, evaluaciones y certificado. Marca en verde lo ya completado.</a:t>
+              <a:t>Módulos, lecciones, evaluaciones y certificado. Marca en verde lo ya completado.</a:t>
             </a:r>
           </a:p>
         </p:txBody>
@@ -37529,7 +37529,7 @@
                 </a:solidFill>
                 <a:latin typeface="Segoe UI"/>
               </a:rPr>
-              <a:t>Continuar donde quedo</a:t>
+              <a:t>Continuar donde quedó</a:t>
             </a:r>
           </a:p>
           <a:p>
@@ -37548,7 +37548,7 @@
                 </a:solidFill>
                 <a:latin typeface="Segoe UI"/>
               </a:rPr>
-              <a:t>El sistema abre por defecto la primera leccion pendiente; no hay que buscarla.</a:t>
+              <a:t>El sistema abre por defecto la primera lección pendiente; no hay que buscarla.</a:t>
             </a:r>
           </a:p>
         </p:txBody>
@@ -37701,7 +37701,7 @@
                 </a:solidFill>
                 <a:latin typeface="Segoe UI"/>
               </a:rPr>
-              <a:t>Mide el tiempo real dedicado a cada leccion y lo acumula en el historico.</a:t>
+              <a:t>Mide el tiempo real dedicado a cada lección y lo acumula en el histórico.</a:t>
             </a:r>
           </a:p>
         </p:txBody>
@@ -37854,7 +37854,7 @@
                 </a:solidFill>
                 <a:latin typeface="Segoe UI"/>
               </a:rPr>
-              <a:t>Boton explicito. Al pulsarlo avanza el porcentaje y salta a la leccion siguiente.</a:t>
+              <a:t>Boton explicito. Al pulsarlo avanza el porcentaje y salta a la lección siguiente.</a:t>
             </a:r>
           </a:p>
         </p:txBody>
@@ -37988,7 +37988,7 @@
                 </a:solidFill>
                 <a:latin typeface="Segoe UI"/>
               </a:rPr>
-              <a:t>Evaluacion final bloqueada</a:t>
+              <a:t>Evaluación final bloqueada</a:t>
             </a:r>
           </a:p>
           <a:p>
@@ -38202,7 +38202,7 @@
                 </a:solidFill>
                 <a:latin typeface="Segoe UI"/>
               </a:rPr>
-              <a:t>LO QUE EL SISTEMA GUARDA DE CADA LECCION</a:t>
+              <a:t>LO QUE EL SISTEMA GUARDA DE CADA LECCIÓN</a:t>
             </a:r>
           </a:p>
         </p:txBody>
@@ -38420,7 +38420,7 @@
                 </a:solidFill>
                 <a:latin typeface="Segoe UI"/>
               </a:rPr>
-              <a:t>avance dentro de la leccion</a:t>
+              <a:t>avance dentro de la lección</a:t>
             </a:r>
           </a:p>
         </p:txBody>
@@ -38856,7 +38856,7 @@
                 </a:solidFill>
                 <a:latin typeface="Segoe UI"/>
               </a:rPr>
-              <a:t>inicio y finalizacion</a:t>
+              <a:t>inicio y finalización</a:t>
             </a:r>
           </a:p>
         </p:txBody>
